--- a/tutorial/T08/tut08.pptx
+++ b/tutorial/T08/tut08.pptx
@@ -125,6 +125,14 @@
 </p:presentation>
 </file>
 
+<file path=ppt/revisionInfo.xml><?xml version="1.0" encoding="utf-8"?>
+<p1510:revInfo xmlns:a="http://schemas.openxmlformats.org/drawingml/2006/main" xmlns:r="http://schemas.openxmlformats.org/officeDocument/2006/relationships" xmlns:p1510="http://schemas.microsoft.com/office/powerpoint/2015/10/main">
+  <p1510:revLst>
+    <p1510:client id="{B4F7DA38-777B-4082-81AE-31BF6AD60E33}" v="12" dt="2025-03-11T08:20:07.596"/>
+  </p1510:revLst>
+</p1510:revInfo>
+</file>
+
 <file path=ppt/changesInfos/changesInfo1.xml><?xml version="1.0" encoding="utf-8"?>
 <pc:chgInfo xmlns:a="http://schemas.openxmlformats.org/drawingml/2006/main" xmlns:r="http://schemas.openxmlformats.org/officeDocument/2006/relationships" xmlns:ac="http://schemas.microsoft.com/office/drawing/2013/main/command" xmlns:pc="http://schemas.microsoft.com/office/powerpoint/2013/main/command">
   <pc:docChgLst>
@@ -230,7 +238,7 @@
   <pc:docChgLst>
     <pc:chgData name="Shaofeng Wu" userId="16cc59afe9483dd5" providerId="LiveId" clId="{B4F7DA38-777B-4082-81AE-31BF6AD60E33}"/>
     <pc:docChg chg="undo custSel modSld">
-      <pc:chgData name="Shaofeng Wu" userId="16cc59afe9483dd5" providerId="LiveId" clId="{B4F7DA38-777B-4082-81AE-31BF6AD60E33}" dt="2025-03-09T02:56:43.203" v="221" actId="20577"/>
+      <pc:chgData name="Shaofeng Wu" userId="16cc59afe9483dd5" providerId="LiveId" clId="{B4F7DA38-777B-4082-81AE-31BF6AD60E33}" dt="2025-03-11T08:20:35.805" v="563" actId="1076"/>
       <pc:docMkLst>
         <pc:docMk/>
       </pc:docMkLst>
@@ -248,6 +256,114 @@
             <ac:spMk id="3" creationId="{8F20472D-613F-3748-9CBD-88055CDB4B08}"/>
           </ac:spMkLst>
         </pc:spChg>
+      </pc:sldChg>
+      <pc:sldChg chg="addSp delSp modSp mod">
+        <pc:chgData name="Shaofeng Wu" userId="16cc59afe9483dd5" providerId="LiveId" clId="{B4F7DA38-777B-4082-81AE-31BF6AD60E33}" dt="2025-03-11T08:16:41.733" v="412" actId="1076"/>
+        <pc:sldMkLst>
+          <pc:docMk/>
+          <pc:sldMk cId="3355003134" sldId="264"/>
+        </pc:sldMkLst>
+        <pc:spChg chg="add mod">
+          <ac:chgData name="Shaofeng Wu" userId="16cc59afe9483dd5" providerId="LiveId" clId="{B4F7DA38-777B-4082-81AE-31BF6AD60E33}" dt="2025-03-11T08:14:37.199" v="271" actId="1076"/>
+          <ac:spMkLst>
+            <pc:docMk/>
+            <pc:sldMk cId="3355003134" sldId="264"/>
+            <ac:spMk id="11" creationId="{C6FB6BB4-4F8E-AD61-3F85-124861F3E224}"/>
+          </ac:spMkLst>
+        </pc:spChg>
+        <pc:spChg chg="add mod">
+          <ac:chgData name="Shaofeng Wu" userId="16cc59afe9483dd5" providerId="LiveId" clId="{B4F7DA38-777B-4082-81AE-31BF6AD60E33}" dt="2025-03-11T08:16:41.733" v="412" actId="1076"/>
+          <ac:spMkLst>
+            <pc:docMk/>
+            <pc:sldMk cId="3355003134" sldId="264"/>
+            <ac:spMk id="12" creationId="{B729219F-ACE8-CCCA-2308-1BF751AD7C71}"/>
+          </ac:spMkLst>
+        </pc:spChg>
+        <pc:spChg chg="add del mod">
+          <ac:chgData name="Shaofeng Wu" userId="16cc59afe9483dd5" providerId="LiveId" clId="{B4F7DA38-777B-4082-81AE-31BF6AD60E33}" dt="2025-03-11T08:16:31.439" v="408"/>
+          <ac:spMkLst>
+            <pc:docMk/>
+            <pc:sldMk cId="3355003134" sldId="264"/>
+            <ac:spMk id="13" creationId="{FF92B303-A385-15AF-C250-1B30E3A0E1BD}"/>
+          </ac:spMkLst>
+        </pc:spChg>
+        <pc:picChg chg="add del mod">
+          <ac:chgData name="Shaofeng Wu" userId="16cc59afe9483dd5" providerId="LiveId" clId="{B4F7DA38-777B-4082-81AE-31BF6AD60E33}" dt="2025-03-11T08:13:53.831" v="240" actId="478"/>
+          <ac:picMkLst>
+            <pc:docMk/>
+            <pc:sldMk cId="3355003134" sldId="264"/>
+            <ac:picMk id="6" creationId="{C728D7CE-3F12-D334-1698-19D0A76D5CE1}"/>
+          </ac:picMkLst>
+        </pc:picChg>
+        <pc:picChg chg="del">
+          <ac:chgData name="Shaofeng Wu" userId="16cc59afe9483dd5" providerId="LiveId" clId="{B4F7DA38-777B-4082-81AE-31BF6AD60E33}" dt="2025-03-11T08:13:14.881" v="234" actId="478"/>
+          <ac:picMkLst>
+            <pc:docMk/>
+            <pc:sldMk cId="3355003134" sldId="264"/>
+            <ac:picMk id="7" creationId="{91B5B167-BABC-889F-07CF-759B9A72194F}"/>
+          </ac:picMkLst>
+        </pc:picChg>
+        <pc:picChg chg="add mod">
+          <ac:chgData name="Shaofeng Wu" userId="16cc59afe9483dd5" providerId="LiveId" clId="{B4F7DA38-777B-4082-81AE-31BF6AD60E33}" dt="2025-03-11T08:14:10.357" v="246" actId="1076"/>
+          <ac:picMkLst>
+            <pc:docMk/>
+            <pc:sldMk cId="3355003134" sldId="264"/>
+            <ac:picMk id="9" creationId="{0FAF9D7D-6199-5D63-D827-9B38A3272CFB}"/>
+          </ac:picMkLst>
+        </pc:picChg>
+      </pc:sldChg>
+      <pc:sldChg chg="addSp modSp mod">
+        <pc:chgData name="Shaofeng Wu" userId="16cc59afe9483dd5" providerId="LiveId" clId="{B4F7DA38-777B-4082-81AE-31BF6AD60E33}" dt="2025-03-11T08:17:22.067" v="497" actId="1076"/>
+        <pc:sldMkLst>
+          <pc:docMk/>
+          <pc:sldMk cId="3168600580" sldId="268"/>
+        </pc:sldMkLst>
+        <pc:spChg chg="add mod">
+          <ac:chgData name="Shaofeng Wu" userId="16cc59afe9483dd5" providerId="LiveId" clId="{B4F7DA38-777B-4082-81AE-31BF6AD60E33}" dt="2025-03-11T08:17:22.067" v="497" actId="1076"/>
+          <ac:spMkLst>
+            <pc:docMk/>
+            <pc:sldMk cId="3168600580" sldId="268"/>
+            <ac:spMk id="6" creationId="{129CC585-B945-0685-33BC-6099A09A602C}"/>
+          </ac:spMkLst>
+        </pc:spChg>
+      </pc:sldChg>
+      <pc:sldChg chg="addSp modSp mod">
+        <pc:chgData name="Shaofeng Wu" userId="16cc59afe9483dd5" providerId="LiveId" clId="{B4F7DA38-777B-4082-81AE-31BF6AD60E33}" dt="2025-03-11T08:20:35.805" v="563" actId="1076"/>
+        <pc:sldMkLst>
+          <pc:docMk/>
+          <pc:sldMk cId="1589765134" sldId="269"/>
+        </pc:sldMkLst>
+        <pc:spChg chg="add mod">
+          <ac:chgData name="Shaofeng Wu" userId="16cc59afe9483dd5" providerId="LiveId" clId="{B4F7DA38-777B-4082-81AE-31BF6AD60E33}" dt="2025-03-11T08:20:35.805" v="563" actId="1076"/>
+          <ac:spMkLst>
+            <pc:docMk/>
+            <pc:sldMk cId="1589765134" sldId="269"/>
+            <ac:spMk id="6" creationId="{FD0FC48C-7C46-7B21-070F-45265DA44F80}"/>
+          </ac:spMkLst>
+        </pc:spChg>
+      </pc:sldChg>
+      <pc:sldChg chg="addSp modSp mod">
+        <pc:chgData name="Shaofeng Wu" userId="16cc59afe9483dd5" providerId="LiveId" clId="{B4F7DA38-777B-4082-81AE-31BF6AD60E33}" dt="2025-03-11T07:17:45.587" v="233" actId="167"/>
+        <pc:sldMkLst>
+          <pc:docMk/>
+          <pc:sldMk cId="3772524970" sldId="275"/>
+        </pc:sldMkLst>
+        <pc:picChg chg="add mod">
+          <ac:chgData name="Shaofeng Wu" userId="16cc59afe9483dd5" providerId="LiveId" clId="{B4F7DA38-777B-4082-81AE-31BF6AD60E33}" dt="2025-03-11T07:17:45.587" v="233" actId="167"/>
+          <ac:picMkLst>
+            <pc:docMk/>
+            <pc:sldMk cId="3772524970" sldId="275"/>
+            <ac:picMk id="3" creationId="{4284D095-6478-13B0-B14D-0404285CCEC4}"/>
+          </ac:picMkLst>
+        </pc:picChg>
+        <pc:picChg chg="mod">
+          <ac:chgData name="Shaofeng Wu" userId="16cc59afe9483dd5" providerId="LiveId" clId="{B4F7DA38-777B-4082-81AE-31BF6AD60E33}" dt="2025-03-11T07:17:36.365" v="228" actId="1076"/>
+          <ac:picMkLst>
+            <pc:docMk/>
+            <pc:sldMk cId="3772524970" sldId="275"/>
+            <ac:picMk id="6" creationId="{624216D1-84FB-1140-9840-C4EA86DE13FC}"/>
+          </ac:picMkLst>
+        </pc:picChg>
       </pc:sldChg>
     </pc:docChg>
   </pc:docChgLst>
@@ -856,7 +972,7 @@
           <a:p>
             <a:fld id="{2425905D-C0C4-D040-B3F5-79CCA23FA4EB}" type="datetimeFigureOut">
               <a:rPr lang="en-US" smtClean="0"/>
-              <a:t>3/9/2025</a:t>
+              <a:t>3/11/2025</a:t>
             </a:fld>
             <a:endParaRPr lang="en-US"/>
           </a:p>
@@ -1056,7 +1172,7 @@
           <a:p>
             <a:fld id="{2425905D-C0C4-D040-B3F5-79CCA23FA4EB}" type="datetimeFigureOut">
               <a:rPr lang="en-US" smtClean="0"/>
-              <a:t>3/9/2025</a:t>
+              <a:t>3/11/2025</a:t>
             </a:fld>
             <a:endParaRPr lang="en-US"/>
           </a:p>
@@ -1266,7 +1382,7 @@
           <a:p>
             <a:fld id="{2425905D-C0C4-D040-B3F5-79CCA23FA4EB}" type="datetimeFigureOut">
               <a:rPr lang="en-US" smtClean="0"/>
-              <a:t>3/9/2025</a:t>
+              <a:t>3/11/2025</a:t>
             </a:fld>
             <a:endParaRPr lang="en-US"/>
           </a:p>
@@ -1466,7 +1582,7 @@
           <a:p>
             <a:fld id="{2425905D-C0C4-D040-B3F5-79CCA23FA4EB}" type="datetimeFigureOut">
               <a:rPr lang="en-US" smtClean="0"/>
-              <a:t>3/9/2025</a:t>
+              <a:t>3/11/2025</a:t>
             </a:fld>
             <a:endParaRPr lang="en-US"/>
           </a:p>
@@ -1742,7 +1858,7 @@
           <a:p>
             <a:fld id="{2425905D-C0C4-D040-B3F5-79CCA23FA4EB}" type="datetimeFigureOut">
               <a:rPr lang="en-US" smtClean="0"/>
-              <a:t>3/9/2025</a:t>
+              <a:t>3/11/2025</a:t>
             </a:fld>
             <a:endParaRPr lang="en-US"/>
           </a:p>
@@ -2010,7 +2126,7 @@
           <a:p>
             <a:fld id="{2425905D-C0C4-D040-B3F5-79CCA23FA4EB}" type="datetimeFigureOut">
               <a:rPr lang="en-US" smtClean="0"/>
-              <a:t>3/9/2025</a:t>
+              <a:t>3/11/2025</a:t>
             </a:fld>
             <a:endParaRPr lang="en-US"/>
           </a:p>
@@ -2425,7 +2541,7 @@
           <a:p>
             <a:fld id="{2425905D-C0C4-D040-B3F5-79CCA23FA4EB}" type="datetimeFigureOut">
               <a:rPr lang="en-US" smtClean="0"/>
-              <a:t>3/9/2025</a:t>
+              <a:t>3/11/2025</a:t>
             </a:fld>
             <a:endParaRPr lang="en-US"/>
           </a:p>
@@ -2567,7 +2683,7 @@
           <a:p>
             <a:fld id="{2425905D-C0C4-D040-B3F5-79CCA23FA4EB}" type="datetimeFigureOut">
               <a:rPr lang="en-US" smtClean="0"/>
-              <a:t>3/9/2025</a:t>
+              <a:t>3/11/2025</a:t>
             </a:fld>
             <a:endParaRPr lang="en-US"/>
           </a:p>
@@ -2680,7 +2796,7 @@
           <a:p>
             <a:fld id="{2425905D-C0C4-D040-B3F5-79CCA23FA4EB}" type="datetimeFigureOut">
               <a:rPr lang="en-US" smtClean="0"/>
-              <a:t>3/9/2025</a:t>
+              <a:t>3/11/2025</a:t>
             </a:fld>
             <a:endParaRPr lang="en-US"/>
           </a:p>
@@ -2993,7 +3109,7 @@
           <a:p>
             <a:fld id="{2425905D-C0C4-D040-B3F5-79CCA23FA4EB}" type="datetimeFigureOut">
               <a:rPr lang="en-US" smtClean="0"/>
-              <a:t>3/9/2025</a:t>
+              <a:t>3/11/2025</a:t>
             </a:fld>
             <a:endParaRPr lang="en-US"/>
           </a:p>
@@ -3282,7 +3398,7 @@
           <a:p>
             <a:fld id="{2425905D-C0C4-D040-B3F5-79CCA23FA4EB}" type="datetimeFigureOut">
               <a:rPr lang="en-US" smtClean="0"/>
-              <a:t>3/9/2025</a:t>
+              <a:t>3/11/2025</a:t>
             </a:fld>
             <a:endParaRPr lang="en-US"/>
           </a:p>
@@ -3525,7 +3641,7 @@
           <a:p>
             <a:fld id="{2425905D-C0C4-D040-B3F5-79CCA23FA4EB}" type="datetimeFigureOut">
               <a:rPr lang="en-US" smtClean="0"/>
-              <a:t>3/9/2025</a:t>
+              <a:t>3/11/2025</a:t>
             </a:fld>
             <a:endParaRPr lang="en-US"/>
           </a:p>
@@ -4317,10 +4433,10 @@
       </p:pic>
       <p:pic>
         <p:nvPicPr>
-          <p:cNvPr id="7" name="图片 6">
-            <a:extLst>
-              <a:ext uri="{FF2B5EF4-FFF2-40B4-BE49-F238E27FC236}">
-                <a16:creationId xmlns:a16="http://schemas.microsoft.com/office/drawing/2014/main" id="{91B5B167-BABC-889F-07CF-759B9A72194F}"/>
+          <p:cNvPr id="9" name="Picture 8">
+            <a:extLst>
+              <a:ext uri="{FF2B5EF4-FFF2-40B4-BE49-F238E27FC236}">
+                <a16:creationId xmlns:a16="http://schemas.microsoft.com/office/drawing/2014/main" id="{0FAF9D7D-6199-5D63-D827-9B38A3272CFB}"/>
               </a:ext>
             </a:extLst>
           </p:cNvPr>
@@ -4337,14 +4453,106 @@
         </p:blipFill>
         <p:spPr>
           <a:xfrm>
-            <a:off x="471631" y="3714888"/>
-            <a:ext cx="8471740" cy="1754325"/>
+            <a:off x="923474" y="3660580"/>
+            <a:ext cx="5353502" cy="3077674"/>
           </a:xfrm>
           <a:prstGeom prst="rect">
             <a:avLst/>
           </a:prstGeom>
         </p:spPr>
       </p:pic>
+      <p:sp>
+        <p:nvSpPr>
+          <p:cNvPr id="11" name="TextBox 10">
+            <a:extLst>
+              <a:ext uri="{FF2B5EF4-FFF2-40B4-BE49-F238E27FC236}">
+                <a16:creationId xmlns:a16="http://schemas.microsoft.com/office/drawing/2014/main" id="{C6FB6BB4-4F8E-AD61-3F85-124861F3E224}"/>
+              </a:ext>
+            </a:extLst>
+          </p:cNvPr>
+          <p:cNvSpPr txBox="1"/>
+          <p:nvPr/>
+        </p:nvSpPr>
+        <p:spPr>
+          <a:xfrm>
+            <a:off x="838200" y="3363019"/>
+            <a:ext cx="1773382" cy="369332"/>
+          </a:xfrm>
+          <a:prstGeom prst="rect">
+            <a:avLst/>
+          </a:prstGeom>
+          <a:noFill/>
+        </p:spPr>
+        <p:txBody>
+          <a:bodyPr wrap="square">
+            <a:spAutoFit/>
+          </a:bodyPr>
+          <a:lstStyle/>
+          <a:p>
+            <a:pPr marL="0" indent="0">
+              <a:buNone/>
+            </a:pPr>
+            <a:r>
+              <a:rPr lang="en-US" sz="1800" dirty="0"/>
+              <a:t>S</a:t>
+            </a:r>
+            <a:r>
+              <a:rPr lang="en-US" altLang="zh-CN" sz="1800" dirty="0"/>
+              <a:t>erver code</a:t>
+            </a:r>
+            <a:endParaRPr lang="en-US" sz="1800" dirty="0"/>
+          </a:p>
+        </p:txBody>
+      </p:sp>
+      <p:sp>
+        <p:nvSpPr>
+          <p:cNvPr id="12" name="TextBox 11">
+            <a:extLst>
+              <a:ext uri="{FF2B5EF4-FFF2-40B4-BE49-F238E27FC236}">
+                <a16:creationId xmlns:a16="http://schemas.microsoft.com/office/drawing/2014/main" id="{B729219F-ACE8-CCCA-2308-1BF751AD7C71}"/>
+              </a:ext>
+            </a:extLst>
+          </p:cNvPr>
+          <p:cNvSpPr txBox="1"/>
+          <p:nvPr/>
+        </p:nvSpPr>
+        <p:spPr>
+          <a:xfrm>
+            <a:off x="5819288" y="4553086"/>
+            <a:ext cx="5864711" cy="646331"/>
+          </a:xfrm>
+          <a:prstGeom prst="rect">
+            <a:avLst/>
+          </a:prstGeom>
+          <a:noFill/>
+        </p:spPr>
+        <p:txBody>
+          <a:bodyPr wrap="square">
+            <a:spAutoFit/>
+          </a:bodyPr>
+          <a:lstStyle/>
+          <a:p>
+            <a:pPr marL="285750" indent="-285750">
+              <a:buFont typeface="Arial" panose="020B0604020202020204" pitchFamily="34" charset="0"/>
+              <a:buChar char="•"/>
+            </a:pPr>
+            <a:r>
+              <a:rPr lang="en-US" dirty="0"/>
+              <a:t>Receive from any IP of this machine (any interface)</a:t>
+            </a:r>
+          </a:p>
+          <a:p>
+            <a:pPr marL="285750" indent="-285750">
+              <a:buFont typeface="Arial" panose="020B0604020202020204" pitchFamily="34" charset="0"/>
+              <a:buChar char="•"/>
+            </a:pPr>
+            <a:r>
+              <a:rPr lang="en-US" dirty="0"/>
+              <a:t>Port used for UDP packets   </a:t>
+            </a:r>
+          </a:p>
+        </p:txBody>
+      </p:sp>
     </p:spTree>
     <p:extLst>
       <p:ext uri="{BB962C8B-B14F-4D97-AF65-F5344CB8AC3E}">
@@ -4558,6 +4766,49 @@
           </a:p>
         </p:txBody>
       </p:sp>
+      <p:sp>
+        <p:nvSpPr>
+          <p:cNvPr id="6" name="TextBox 5">
+            <a:extLst>
+              <a:ext uri="{FF2B5EF4-FFF2-40B4-BE49-F238E27FC236}">
+                <a16:creationId xmlns:a16="http://schemas.microsoft.com/office/drawing/2014/main" id="{129CC585-B945-0685-33BC-6099A09A602C}"/>
+              </a:ext>
+            </a:extLst>
+          </p:cNvPr>
+          <p:cNvSpPr txBox="1"/>
+          <p:nvPr/>
+        </p:nvSpPr>
+        <p:spPr>
+          <a:xfrm>
+            <a:off x="5403274" y="5487012"/>
+            <a:ext cx="6557438" cy="369332"/>
+          </a:xfrm>
+          <a:prstGeom prst="rect">
+            <a:avLst/>
+          </a:prstGeom>
+          <a:noFill/>
+        </p:spPr>
+        <p:txBody>
+          <a:bodyPr wrap="square">
+            <a:spAutoFit/>
+          </a:bodyPr>
+          <a:lstStyle/>
+          <a:p>
+            <a:r>
+              <a:rPr lang="en-US" dirty="0"/>
+              <a:t>Question here: How do I know the </a:t>
+            </a:r>
+            <a:r>
+              <a:rPr lang="en-US" dirty="0" err="1"/>
+              <a:t>sockaddr</a:t>
+            </a:r>
+            <a:r>
+              <a:rPr lang="en-US" dirty="0"/>
+              <a:t> of the receiving side?</a:t>
+            </a:r>
+          </a:p>
+        </p:txBody>
+      </p:sp>
     </p:spTree>
     <p:extLst>
       <p:ext uri="{BB962C8B-B14F-4D97-AF65-F5344CB8AC3E}">
@@ -4771,6 +5022,45 @@
           </a:p>
         </p:txBody>
       </p:sp>
+      <p:sp>
+        <p:nvSpPr>
+          <p:cNvPr id="6" name="TextBox 5">
+            <a:extLst>
+              <a:ext uri="{FF2B5EF4-FFF2-40B4-BE49-F238E27FC236}">
+                <a16:creationId xmlns:a16="http://schemas.microsoft.com/office/drawing/2014/main" id="{FD0FC48C-7C46-7B21-070F-45265DA44F80}"/>
+              </a:ext>
+            </a:extLst>
+          </p:cNvPr>
+          <p:cNvSpPr txBox="1"/>
+          <p:nvPr/>
+        </p:nvSpPr>
+        <p:spPr>
+          <a:xfrm>
+            <a:off x="6705601" y="5183421"/>
+            <a:ext cx="2983344" cy="338554"/>
+          </a:xfrm>
+          <a:prstGeom prst="rect">
+            <a:avLst/>
+          </a:prstGeom>
+          <a:noFill/>
+        </p:spPr>
+        <p:txBody>
+          <a:bodyPr wrap="square">
+            <a:spAutoFit/>
+          </a:bodyPr>
+          <a:lstStyle/>
+          <a:p>
+            <a:r>
+              <a:rPr lang="en-US" sz="1600" dirty="0">
+                <a:solidFill>
+                  <a:srgbClr val="FF0000"/>
+                </a:solidFill>
+              </a:rPr>
+              <a:t>(This part will be populated)</a:t>
+            </a:r>
+          </a:p>
+        </p:txBody>
+      </p:sp>
     </p:spTree>
     <p:extLst>
       <p:ext uri="{BB962C8B-B14F-4D97-AF65-F5344CB8AC3E}">
@@ -5237,11 +5527,7 @@
             </a:r>
             <a:r>
               <a:rPr lang="en-US" altLang="zh-CN" sz="2000" dirty="0"/>
-              <a:t>May 9</a:t>
-            </a:r>
-            <a:r>
-              <a:rPr lang="en-US" altLang="zh-CN" sz="2000"/>
-              <a:t>, 2025, Friday</a:t>
+              <a:t>May 9, 2025, Friday</a:t>
             </a:r>
             <a:r>
               <a:rPr lang="en-US" sz="2000" dirty="0"/>
@@ -5401,6 +5687,55 @@
           <a:chExt cx="0" cy="0"/>
         </a:xfrm>
       </p:grpSpPr>
+      <p:pic>
+        <p:nvPicPr>
+          <p:cNvPr id="3" name="Picture 1" descr="page5image579262464">
+            <a:extLst>
+              <a:ext uri="{FF2B5EF4-FFF2-40B4-BE49-F238E27FC236}">
+                <a16:creationId xmlns:a16="http://schemas.microsoft.com/office/drawing/2014/main" id="{4284D095-6478-13B0-B14D-0404285CCEC4}"/>
+              </a:ext>
+            </a:extLst>
+          </p:cNvPr>
+          <p:cNvPicPr>
+            <a:picLocks noGrp="1" noChangeAspect="1" noChangeArrowheads="1"/>
+          </p:cNvPicPr>
+          <p:nvPr>
+            <p:ph idx="1"/>
+          </p:nvPr>
+        </p:nvPicPr>
+        <p:blipFill>
+          <a:blip r:embed="rId2">
+            <a:extLst>
+              <a:ext uri="{28A0092B-C50C-407E-A947-70E740481C1C}">
+                <a14:useLocalDpi xmlns:a14="http://schemas.microsoft.com/office/drawing/2010/main" val="0"/>
+              </a:ext>
+            </a:extLst>
+          </a:blip>
+          <a:srcRect/>
+          <a:stretch>
+            <a:fillRect/>
+          </a:stretch>
+        </p:blipFill>
+        <p:spPr bwMode="auto">
+          <a:xfrm>
+            <a:off x="6515665" y="2185988"/>
+            <a:ext cx="5676335" cy="3781286"/>
+          </a:xfrm>
+          <a:prstGeom prst="rect">
+            <a:avLst/>
+          </a:prstGeom>
+          <a:noFill/>
+          <a:extLst>
+            <a:ext uri="{909E8E84-426E-40DD-AFC4-6F175D3DCCD1}">
+              <a14:hiddenFill xmlns:a14="http://schemas.microsoft.com/office/drawing/2010/main">
+                <a:solidFill>
+                  <a:srgbClr val="FFFFFF"/>
+                </a:solidFill>
+              </a14:hiddenFill>
+            </a:ext>
+          </a:extLst>
+        </p:spPr>
+      </p:pic>
       <p:sp>
         <p:nvSpPr>
           <p:cNvPr id="2" name="Title 1">
@@ -5444,15 +5779,15 @@
           <p:nvPr/>
         </p:nvPicPr>
         <p:blipFill>
-          <a:blip r:embed="rId2"/>
+          <a:blip r:embed="rId3"/>
           <a:stretch>
             <a:fillRect/>
           </a:stretch>
         </p:blipFill>
         <p:spPr>
           <a:xfrm>
-            <a:off x="1395833" y="1690688"/>
-            <a:ext cx="8382565" cy="4248043"/>
+            <a:off x="190500" y="2271713"/>
+            <a:ext cx="6439465" cy="3263336"/>
           </a:xfrm>
           <a:prstGeom prst="rect">
             <a:avLst/>
